--- a/skills/presentation-template-library/skills/artifact-template-paper-seminar/assets/reference.pptx
+++ b/skills/presentation-template-library/skills/artifact-template-paper-seminar/assets/reference.pptx
@@ -400,8 +400,8 @@
           <p:nvPr/>
         </p:nvPicPr>
         <p:blipFill>
-          <a:blip xmlns:r="http://schemas.openxmlformats.org/officeDocument/2006/relationships" xmlns:a="http://schemas.openxmlformats.org/drawingml/2006/main" r:embed="rIdOfficeKitImage6af8c9b5dff6e3a3_1"/>
-          <a:srcRect xmlns:a="http://schemas.openxmlformats.org/drawingml/2006/main" l="0" t="34171" r="0" b="34171"/>
+          <a:blip xmlns:r="http://schemas.openxmlformats.org/officeDocument/2006/relationships" xmlns:a="http://schemas.openxmlformats.org/drawingml/2006/main" r:embed="rIdOfficeKitImaged71bfa074cda59bb_1"/>
+          <a:srcRect xmlns:a="http://schemas.openxmlformats.org/drawingml/2006/main" l="0" t="34180" r="0" b="34180"/>
           <a:stretch xmlns:a="http://schemas.openxmlformats.org/drawingml/2006/main">
             <a:fillRect/>
           </a:stretch>
@@ -1250,7 +1250,7 @@
           <p:nvPr/>
         </p:nvPicPr>
         <p:blipFill>
-          <a:blip xmlns:r="http://schemas.openxmlformats.org/officeDocument/2006/relationships" xmlns:a="http://schemas.openxmlformats.org/drawingml/2006/main" r:embed="rIdOfficeKitImage8bca39c9b7ba070f_1"/>
+          <a:blip xmlns:r="http://schemas.openxmlformats.org/officeDocument/2006/relationships" xmlns:a="http://schemas.openxmlformats.org/drawingml/2006/main" r:embed="rIdOfficeKitImage6af8c9b5dff6e3a3_1"/>
           <a:srcRect xmlns:a="http://schemas.openxmlformats.org/drawingml/2006/main" l="0" t="47256" r="0" b="47256"/>
           <a:stretch xmlns:a="http://schemas.openxmlformats.org/drawingml/2006/main">
             <a:fillRect/>
@@ -2180,8 +2180,8 @@
           <p:nvPr/>
         </p:nvPicPr>
         <p:blipFill>
-          <a:blip xmlns:r="http://schemas.openxmlformats.org/officeDocument/2006/relationships" xmlns:a="http://schemas.openxmlformats.org/drawingml/2006/main" r:embed="rIdOfficeKitImaged71bfa074cda59bb_1"/>
-          <a:srcRect xmlns:a="http://schemas.openxmlformats.org/drawingml/2006/main" l="0" t="47258" r="0" b="47258"/>
+          <a:blip xmlns:r="http://schemas.openxmlformats.org/officeDocument/2006/relationships" xmlns:a="http://schemas.openxmlformats.org/drawingml/2006/main" r:embed="rIdOfficeKitImage8bca39c9b7ba070f_1"/>
+          <a:srcRect xmlns:a="http://schemas.openxmlformats.org/drawingml/2006/main" l="0" t="47256" r="0" b="47256"/>
           <a:stretch xmlns:a="http://schemas.openxmlformats.org/drawingml/2006/main">
             <a:fillRect/>
           </a:stretch>
@@ -2393,7 +2393,7 @@
         </p:xfrm>
         <a:graphic xmlns:a="http://schemas.openxmlformats.org/drawingml/2006/main">
           <a:graphicData uri="http://schemas.openxmlformats.org/drawingml/2006/chart">
-            <c:chart xmlns:r="http://schemas.openxmlformats.org/officeDocument/2006/relationships" xmlns:c="http://schemas.openxmlformats.org/drawingml/2006/chart" r:id="R021dcf493d5c4ed6"/>
+            <c:chart xmlns:r="http://schemas.openxmlformats.org/officeDocument/2006/relationships" xmlns:c="http://schemas.openxmlformats.org/drawingml/2006/chart" r:id="R1e7f8b6a99a84b9b"/>
           </a:graphicData>
         </a:graphic>
       </p:graphicFrame>
@@ -2764,8 +2764,8 @@
           <p:nvPr/>
         </p:nvPicPr>
         <p:blipFill>
-          <a:blip xmlns:r="http://schemas.openxmlformats.org/officeDocument/2006/relationships" xmlns:a="http://schemas.openxmlformats.org/drawingml/2006/main" r:embed="rIdOfficeKitImage6af8c9b5dff6e3a3_1"/>
-          <a:srcRect xmlns:a="http://schemas.openxmlformats.org/drawingml/2006/main" l="0" t="47256" r="0" b="47256"/>
+          <a:blip xmlns:r="http://schemas.openxmlformats.org/officeDocument/2006/relationships" xmlns:a="http://schemas.openxmlformats.org/drawingml/2006/main" r:embed="rIdOfficeKitImaged71bfa074cda59bb_1"/>
+          <a:srcRect xmlns:a="http://schemas.openxmlformats.org/drawingml/2006/main" l="0" t="47258" r="0" b="47258"/>
           <a:stretch xmlns:a="http://schemas.openxmlformats.org/drawingml/2006/main">
             <a:fillRect/>
           </a:stretch>
@@ -3951,8 +3951,8 @@
           <p:nvPr/>
         </p:nvPicPr>
         <p:blipFill>
-          <a:blip xmlns:r="http://schemas.openxmlformats.org/officeDocument/2006/relationships" xmlns:a="http://schemas.openxmlformats.org/drawingml/2006/main" r:embed="rIdOfficeKitImage8bca39c9b7ba070f_1"/>
-          <a:srcRect xmlns:a="http://schemas.openxmlformats.org/drawingml/2006/main" l="0" t="47256" r="0" b="47256"/>
+          <a:blip xmlns:r="http://schemas.openxmlformats.org/officeDocument/2006/relationships" xmlns:a="http://schemas.openxmlformats.org/drawingml/2006/main" r:embed="rIdOfficeKitImage8fbc298f8d1b7a3c_1"/>
+          <a:srcRect xmlns:a="http://schemas.openxmlformats.org/drawingml/2006/main" l="0" t="47258" r="0" b="47258"/>
           <a:stretch xmlns:a="http://schemas.openxmlformats.org/drawingml/2006/main">
             <a:fillRect/>
           </a:stretch>
@@ -5217,8 +5217,8 @@
           <p:nvPr/>
         </p:nvPicPr>
         <p:blipFill>
-          <a:blip xmlns:r="http://schemas.openxmlformats.org/officeDocument/2006/relationships" xmlns:a="http://schemas.openxmlformats.org/drawingml/2006/main" r:embed="rIdOfficeKitImaged71bfa074cda59bb_1"/>
-          <a:srcRect xmlns:a="http://schemas.openxmlformats.org/drawingml/2006/main" l="0" t="47258" r="0" b="47258"/>
+          <a:blip xmlns:r="http://schemas.openxmlformats.org/officeDocument/2006/relationships" xmlns:a="http://schemas.openxmlformats.org/drawingml/2006/main" r:embed="rIdOfficeKitImage6af8c9b5dff6e3a3_1"/>
+          <a:srcRect xmlns:a="http://schemas.openxmlformats.org/drawingml/2006/main" l="0" t="47256" r="0" b="47256"/>
           <a:stretch xmlns:a="http://schemas.openxmlformats.org/drawingml/2006/main">
             <a:fillRect/>
           </a:stretch>

--- a/skills/presentation-template-library/skills/artifact-template-paper-seminar/assets/reference.pptx
+++ b/skills/presentation-template-library/skills/artifact-template-paper-seminar/assets/reference.pptx
@@ -400,8 +400,8 @@
           <p:nvPr/>
         </p:nvPicPr>
         <p:blipFill>
-          <a:blip xmlns:r="http://schemas.openxmlformats.org/officeDocument/2006/relationships" xmlns:a="http://schemas.openxmlformats.org/drawingml/2006/main" r:embed="rIdOfficeKitImaged71bfa074cda59bb_1"/>
-          <a:srcRect xmlns:a="http://schemas.openxmlformats.org/drawingml/2006/main" l="0" t="34180" r="0" b="34180"/>
+          <a:blip xmlns:r="http://schemas.openxmlformats.org/officeDocument/2006/relationships" xmlns:a="http://schemas.openxmlformats.org/drawingml/2006/main" r:embed="rIdOfficeKitImage6af8c9b5dff6e3a3_1"/>
+          <a:srcRect xmlns:a="http://schemas.openxmlformats.org/drawingml/2006/main" l="0" t="34171" r="0" b="34171"/>
           <a:stretch xmlns:a="http://schemas.openxmlformats.org/drawingml/2006/main">
             <a:fillRect/>
           </a:stretch>
@@ -1250,7 +1250,7 @@
           <p:nvPr/>
         </p:nvPicPr>
         <p:blipFill>
-          <a:blip xmlns:r="http://schemas.openxmlformats.org/officeDocument/2006/relationships" xmlns:a="http://schemas.openxmlformats.org/drawingml/2006/main" r:embed="rIdOfficeKitImage6af8c9b5dff6e3a3_1"/>
+          <a:blip xmlns:r="http://schemas.openxmlformats.org/officeDocument/2006/relationships" xmlns:a="http://schemas.openxmlformats.org/drawingml/2006/main" r:embed="rIdOfficeKitImage8bca39c9b7ba070f_1"/>
           <a:srcRect xmlns:a="http://schemas.openxmlformats.org/drawingml/2006/main" l="0" t="47256" r="0" b="47256"/>
           <a:stretch xmlns:a="http://schemas.openxmlformats.org/drawingml/2006/main">
             <a:fillRect/>
@@ -2180,8 +2180,8 @@
           <p:nvPr/>
         </p:nvPicPr>
         <p:blipFill>
-          <a:blip xmlns:r="http://schemas.openxmlformats.org/officeDocument/2006/relationships" xmlns:a="http://schemas.openxmlformats.org/drawingml/2006/main" r:embed="rIdOfficeKitImage8bca39c9b7ba070f_1"/>
-          <a:srcRect xmlns:a="http://schemas.openxmlformats.org/drawingml/2006/main" l="0" t="47256" r="0" b="47256"/>
+          <a:blip xmlns:r="http://schemas.openxmlformats.org/officeDocument/2006/relationships" xmlns:a="http://schemas.openxmlformats.org/drawingml/2006/main" r:embed="rIdOfficeKitImage8fbc298f8d1b7a3c_1"/>
+          <a:srcRect xmlns:a="http://schemas.openxmlformats.org/drawingml/2006/main" l="0" t="47258" r="0" b="47258"/>
           <a:stretch xmlns:a="http://schemas.openxmlformats.org/drawingml/2006/main">
             <a:fillRect/>
           </a:stretch>
@@ -2393,7 +2393,7 @@
         </p:xfrm>
         <a:graphic xmlns:a="http://schemas.openxmlformats.org/drawingml/2006/main">
           <a:graphicData uri="http://schemas.openxmlformats.org/drawingml/2006/chart">
-            <c:chart xmlns:r="http://schemas.openxmlformats.org/officeDocument/2006/relationships" xmlns:c="http://schemas.openxmlformats.org/drawingml/2006/chart" r:id="R1e7f8b6a99a84b9b"/>
+            <c:chart xmlns:r="http://schemas.openxmlformats.org/officeDocument/2006/relationships" xmlns:c="http://schemas.openxmlformats.org/drawingml/2006/chart" r:id="Rdb52d7e32d4d4722"/>
           </a:graphicData>
         </a:graphic>
       </p:graphicFrame>
@@ -3951,8 +3951,8 @@
           <p:nvPr/>
         </p:nvPicPr>
         <p:blipFill>
-          <a:blip xmlns:r="http://schemas.openxmlformats.org/officeDocument/2006/relationships" xmlns:a="http://schemas.openxmlformats.org/drawingml/2006/main" r:embed="rIdOfficeKitImage8fbc298f8d1b7a3c_1"/>
-          <a:srcRect xmlns:a="http://schemas.openxmlformats.org/drawingml/2006/main" l="0" t="47258" r="0" b="47258"/>
+          <a:blip xmlns:r="http://schemas.openxmlformats.org/officeDocument/2006/relationships" xmlns:a="http://schemas.openxmlformats.org/drawingml/2006/main" r:embed="rIdOfficeKitImage45ba195e2a5649fb_1"/>
+          <a:srcRect xmlns:a="http://schemas.openxmlformats.org/drawingml/2006/main" l="0" t="47256" r="0" b="47256"/>
           <a:stretch xmlns:a="http://schemas.openxmlformats.org/drawingml/2006/main">
             <a:fillRect/>
           </a:stretch>

--- a/skills/presentation-template-library/skills/artifact-template-paper-seminar/assets/reference.pptx
+++ b/skills/presentation-template-library/skills/artifact-template-paper-seminar/assets/reference.pptx
@@ -373,6 +373,16 @@
 <file path=ppt/slides/slide1.xml><?xml version="1.0" encoding="utf-8"?>
 <p:sld xmlns:p="http://schemas.openxmlformats.org/presentationml/2006/main">
   <p:cSld name="Opening claim">
+    <p:bg>
+      <p:bgPr>
+        <a:blipFill xmlns:a="http://schemas.openxmlformats.org/drawingml/2006/main">
+          <a:blip xmlns:r="http://schemas.openxmlformats.org/officeDocument/2006/relationships" r:embed="rIdOfficeKitImage6af8c9b5dff6e3a3_1"/>
+          <a:stretch>
+            <a:fillRect/>
+          </a:stretch>
+        </a:blipFill>
+      </p:bgPr>
+    </p:bg>
     <p:spTree>
       <p:nvGrpSpPr>
         <p:cNvPr id="1" name=""/>
@@ -387,38 +397,9 @@
           <a:chExt cx="0" cy="0"/>
         </a:xfrm>
       </p:grpSpPr>
-      <p:pic>
-        <p:nvPicPr>
-          <p:cNvPr id="2" name="artifact-template-paper-seminar-cover-field">
-            <a:extLst xmlns:a="http://schemas.openxmlformats.org/drawingml/2006/main">
-              <a:ext uri="{C183D7F6-B498-43B3-948B-1728B52AA6E4}">
-                <adec:decorative xmlns:adec="http://schemas.microsoft.com/office/drawing/2017/decorative" val="1"/>
-              </a:ext>
-            </a:extLst>
-          </p:cNvPr>
-          <p:cNvPicPr/>
-          <p:nvPr/>
-        </p:nvPicPr>
-        <p:blipFill>
-          <a:blip xmlns:r="http://schemas.openxmlformats.org/officeDocument/2006/relationships" xmlns:a="http://schemas.openxmlformats.org/drawingml/2006/main" r:embed="rIdOfficeKitImage6af8c9b5dff6e3a3_1"/>
-          <a:srcRect xmlns:a="http://schemas.openxmlformats.org/drawingml/2006/main" l="0" t="34171" r="0" b="34171"/>
-          <a:stretch xmlns:a="http://schemas.openxmlformats.org/drawingml/2006/main">
-            <a:fillRect/>
-          </a:stretch>
-        </p:blipFill>
-        <p:spPr>
-          <a:xfrm xmlns:a="http://schemas.openxmlformats.org/drawingml/2006/main">
-            <a:off x="0" y="0"/>
-            <a:ext cx="15240000" cy="8572500"/>
-          </a:xfrm>
-          <a:prstGeom xmlns:a="http://schemas.openxmlformats.org/drawingml/2006/main" prst="rect">
-            <a:avLst/>
-          </a:prstGeom>
-        </p:spPr>
-      </p:pic>
-      <p:sp>
-        <p:nvSpPr>
-          <p:cNvPr id="3" name="cover-paper-scrim"/>
+      <p:sp>
+        <p:nvSpPr>
+          <p:cNvPr id="2" name="cover-paper-scrim"/>
           <p:cNvSpPr/>
           <p:nvPr/>
         </p:nvSpPr>
@@ -456,7 +437,7 @@
       </p:sp>
       <p:sp>
         <p:nvSpPr>
-          <p:cNvPr id="4" name="top-rule"/>
+          <p:cNvPr id="3" name="top-rule"/>
           <p:cNvSpPr/>
           <p:nvPr/>
         </p:nvSpPr>
@@ -490,7 +471,7 @@
       </p:sp>
       <p:sp>
         <p:nvSpPr>
-          <p:cNvPr id="5" name="eyebrow"/>
+          <p:cNvPr id="4" name="eyebrow"/>
           <p:cNvSpPr txBox="1"/>
           <p:nvPr/>
         </p:nvSpPr>
@@ -527,7 +508,7 @@
       </p:sp>
       <p:sp>
         <p:nvSpPr>
-          <p:cNvPr id="6" name="cover-title"/>
+          <p:cNvPr id="5" name="cover-title"/>
           <p:cNvSpPr txBox="1"/>
           <p:nvPr/>
         </p:nvSpPr>
@@ -564,7 +545,7 @@
       </p:sp>
       <p:sp>
         <p:nvSpPr>
-          <p:cNvPr id="7" name="cover-subtitle"/>
+          <p:cNvPr id="6" name="cover-subtitle"/>
           <p:cNvSpPr txBox="1"/>
           <p:nvPr/>
         </p:nvSpPr>
@@ -601,7 +582,7 @@
       </p:sp>
       <p:sp>
         <p:nvSpPr>
-          <p:cNvPr id="8" name="cover-rule"/>
+          <p:cNvPr id="7" name="cover-rule"/>
           <p:cNvSpPr/>
           <p:nvPr/>
         </p:nvSpPr>
@@ -635,7 +616,7 @@
       </p:sp>
       <p:sp>
         <p:nvSpPr>
-          <p:cNvPr id="9" name="cover-basis"/>
+          <p:cNvPr id="8" name="cover-basis"/>
           <p:cNvSpPr txBox="1"/>
           <p:nvPr/>
         </p:nvSpPr>
@@ -672,7 +653,7 @@
       </p:sp>
       <p:sp>
         <p:nvSpPr>
-          <p:cNvPr id="10" name="cover-thesis"/>
+          <p:cNvPr id="9" name="cover-thesis"/>
           <p:cNvSpPr txBox="1"/>
           <p:nvPr/>
         </p:nvSpPr>
@@ -709,7 +690,7 @@
       </p:sp>
       <p:sp>
         <p:nvSpPr>
-          <p:cNvPr id="11" name="cover-source"/>
+          <p:cNvPr id="10" name="cover-source"/>
           <p:cNvSpPr txBox="1"/>
           <p:nvPr/>
         </p:nvSpPr>
@@ -746,7 +727,7 @@
       </p:sp>
       <p:sp>
         <p:nvSpPr>
-          <p:cNvPr id="12" name="page-number"/>
+          <p:cNvPr id="11" name="page-number"/>
           <p:cNvSpPr txBox="1"/>
           <p:nvPr/>
         </p:nvSpPr>
@@ -784,7 +765,7 @@
       </p:sp>
       <p:sp>
         <p:nvSpPr>
-          <p:cNvPr id="13" name="anchor-field"/>
+          <p:cNvPr id="12" name="anchor-field"/>
           <p:cNvSpPr/>
           <p:nvPr/>
         </p:nvSpPr>
@@ -820,7 +801,7 @@
       </p:sp>
       <p:sp>
         <p:nvSpPr>
-          <p:cNvPr id="14" name="anchor-grid-0-0"/>
+          <p:cNvPr id="13" name="anchor-grid-0-0"/>
           <p:cNvSpPr/>
           <p:nvPr/>
         </p:nvSpPr>
@@ -856,7 +837,7 @@
       </p:sp>
       <p:sp>
         <p:nvSpPr>
-          <p:cNvPr id="15" name="anchor-grid-0-1"/>
+          <p:cNvPr id="14" name="anchor-grid-0-1"/>
           <p:cNvSpPr/>
           <p:nvPr/>
         </p:nvSpPr>
@@ -892,7 +873,7 @@
       </p:sp>
       <p:sp>
         <p:nvSpPr>
-          <p:cNvPr id="16" name="anchor-grid-0-2"/>
+          <p:cNvPr id="15" name="anchor-grid-0-2"/>
           <p:cNvSpPr/>
           <p:nvPr/>
         </p:nvSpPr>
@@ -928,7 +909,7 @@
       </p:sp>
       <p:sp>
         <p:nvSpPr>
-          <p:cNvPr id="17" name="anchor-grid-1-0"/>
+          <p:cNvPr id="16" name="anchor-grid-1-0"/>
           <p:cNvSpPr/>
           <p:nvPr/>
         </p:nvSpPr>
@@ -964,7 +945,7 @@
       </p:sp>
       <p:sp>
         <p:nvSpPr>
-          <p:cNvPr id="18" name="anchor-grid-1-1"/>
+          <p:cNvPr id="17" name="anchor-grid-1-1"/>
           <p:cNvSpPr/>
           <p:nvPr/>
         </p:nvSpPr>
@@ -1000,7 +981,7 @@
       </p:sp>
       <p:sp>
         <p:nvSpPr>
-          <p:cNvPr id="19" name="anchor-grid-1-2"/>
+          <p:cNvPr id="18" name="anchor-grid-1-2"/>
           <p:cNvSpPr/>
           <p:nvPr/>
         </p:nvSpPr>
@@ -1036,7 +1017,7 @@
       </p:sp>
       <p:sp>
         <p:nvSpPr>
-          <p:cNvPr id="20" name="anchor-grid-2-0"/>
+          <p:cNvPr id="19" name="anchor-grid-2-0"/>
           <p:cNvSpPr/>
           <p:nvPr/>
         </p:nvSpPr>
@@ -1072,7 +1053,7 @@
       </p:sp>
       <p:sp>
         <p:nvSpPr>
-          <p:cNvPr id="21" name="anchor-grid-2-1"/>
+          <p:cNvPr id="20" name="anchor-grid-2-1"/>
           <p:cNvSpPr/>
           <p:nvPr/>
         </p:nvSpPr>
@@ -1108,7 +1089,7 @@
       </p:sp>
       <p:sp>
         <p:nvSpPr>
-          <p:cNvPr id="22" name="anchor-grid-2-2"/>
+          <p:cNvPr id="21" name="anchor-grid-2-2"/>
           <p:cNvSpPr/>
           <p:nvPr/>
         </p:nvSpPr>
@@ -1144,7 +1125,7 @@
       </p:sp>
       <p:sp>
         <p:nvSpPr>
-          <p:cNvPr id="23" name="anchor-axis"/>
+          <p:cNvPr id="22" name="anchor-axis"/>
           <p:cNvSpPr/>
           <p:nvPr/>
         </p:nvSpPr>
@@ -2393,7 +2374,7 @@
         </p:xfrm>
         <a:graphic xmlns:a="http://schemas.openxmlformats.org/drawingml/2006/main">
           <a:graphicData uri="http://schemas.openxmlformats.org/drawingml/2006/chart">
-            <c:chart xmlns:r="http://schemas.openxmlformats.org/officeDocument/2006/relationships" xmlns:c="http://schemas.openxmlformats.org/drawingml/2006/chart" r:id="Rdb52d7e32d4d4722"/>
+            <c:chart xmlns:r="http://schemas.openxmlformats.org/officeDocument/2006/relationships" xmlns:c="http://schemas.openxmlformats.org/drawingml/2006/chart" r:id="R383f833084d64cac"/>
           </a:graphicData>
         </a:graphic>
       </p:graphicFrame>

--- a/skills/presentation-template-library/skills/artifact-template-paper-seminar/assets/reference.pptx
+++ b/skills/presentation-template-library/skills/artifact-template-paper-seminar/assets/reference.pptx
@@ -376,7 +376,7 @@
     <p:bg>
       <p:bgPr>
         <a:blipFill xmlns:a="http://schemas.openxmlformats.org/drawingml/2006/main">
-          <a:blip xmlns:r="http://schemas.openxmlformats.org/officeDocument/2006/relationships" r:embed="rIdOfficeKitImage6af8c9b5dff6e3a3_1"/>
+          <a:blip xmlns:r="http://schemas.openxmlformats.org/officeDocument/2006/relationships" r:embed="rIdOfficeKitImage56df3e49f11f0ff0_1"/>
           <a:stretch>
             <a:fillRect/>
           </a:stretch>
@@ -2161,7 +2161,7 @@
           <p:nvPr/>
         </p:nvPicPr>
         <p:blipFill>
-          <a:blip xmlns:r="http://schemas.openxmlformats.org/officeDocument/2006/relationships" xmlns:a="http://schemas.openxmlformats.org/drawingml/2006/main" r:embed="rIdOfficeKitImage8fbc298f8d1b7a3c_1"/>
+          <a:blip xmlns:r="http://schemas.openxmlformats.org/officeDocument/2006/relationships" xmlns:a="http://schemas.openxmlformats.org/drawingml/2006/main" r:embed="rIdOfficeKitImagec2e9a9d799668dd3_1"/>
           <a:srcRect xmlns:a="http://schemas.openxmlformats.org/drawingml/2006/main" l="0" t="47258" r="0" b="47258"/>
           <a:stretch xmlns:a="http://schemas.openxmlformats.org/drawingml/2006/main">
             <a:fillRect/>
@@ -2374,7 +2374,7 @@
         </p:xfrm>
         <a:graphic xmlns:a="http://schemas.openxmlformats.org/drawingml/2006/main">
           <a:graphicData uri="http://schemas.openxmlformats.org/drawingml/2006/chart">
-            <c:chart xmlns:r="http://schemas.openxmlformats.org/officeDocument/2006/relationships" xmlns:c="http://schemas.openxmlformats.org/drawingml/2006/chart" r:id="R383f833084d64cac"/>
+            <c:chart xmlns:r="http://schemas.openxmlformats.org/officeDocument/2006/relationships" xmlns:c="http://schemas.openxmlformats.org/drawingml/2006/chart" r:id="Rd194f54bf7d04887"/>
           </a:graphicData>
         </a:graphic>
       </p:graphicFrame>
@@ -2745,7 +2745,7 @@
           <p:nvPr/>
         </p:nvPicPr>
         <p:blipFill>
-          <a:blip xmlns:r="http://schemas.openxmlformats.org/officeDocument/2006/relationships" xmlns:a="http://schemas.openxmlformats.org/drawingml/2006/main" r:embed="rIdOfficeKitImaged71bfa074cda59bb_1"/>
+          <a:blip xmlns:r="http://schemas.openxmlformats.org/officeDocument/2006/relationships" xmlns:a="http://schemas.openxmlformats.org/drawingml/2006/main" r:embed="rIdOfficeKitImage8fbc298f8d1b7a3c_1"/>
           <a:srcRect xmlns:a="http://schemas.openxmlformats.org/drawingml/2006/main" l="0" t="47258" r="0" b="47258"/>
           <a:stretch xmlns:a="http://schemas.openxmlformats.org/drawingml/2006/main">
             <a:fillRect/>
@@ -3932,8 +3932,8 @@
           <p:nvPr/>
         </p:nvPicPr>
         <p:blipFill>
-          <a:blip xmlns:r="http://schemas.openxmlformats.org/officeDocument/2006/relationships" xmlns:a="http://schemas.openxmlformats.org/drawingml/2006/main" r:embed="rIdOfficeKitImage45ba195e2a5649fb_1"/>
-          <a:srcRect xmlns:a="http://schemas.openxmlformats.org/drawingml/2006/main" l="0" t="47256" r="0" b="47256"/>
+          <a:blip xmlns:r="http://schemas.openxmlformats.org/officeDocument/2006/relationships" xmlns:a="http://schemas.openxmlformats.org/drawingml/2006/main" r:embed="rIdOfficeKitImage56df3e49f11f0ff0_1"/>
+          <a:srcRect xmlns:a="http://schemas.openxmlformats.org/drawingml/2006/main" l="0" t="47258" r="0" b="47258"/>
           <a:stretch xmlns:a="http://schemas.openxmlformats.org/drawingml/2006/main">
             <a:fillRect/>
           </a:stretch>
@@ -5198,7 +5198,7 @@
           <p:nvPr/>
         </p:nvPicPr>
         <p:blipFill>
-          <a:blip xmlns:r="http://schemas.openxmlformats.org/officeDocument/2006/relationships" xmlns:a="http://schemas.openxmlformats.org/drawingml/2006/main" r:embed="rIdOfficeKitImage6af8c9b5dff6e3a3_1"/>
+          <a:blip xmlns:r="http://schemas.openxmlformats.org/officeDocument/2006/relationships" xmlns:a="http://schemas.openxmlformats.org/drawingml/2006/main" r:embed="rIdOfficeKitImage8bca39c9b7ba070f_1"/>
           <a:srcRect xmlns:a="http://schemas.openxmlformats.org/drawingml/2006/main" l="0" t="47256" r="0" b="47256"/>
           <a:stretch xmlns:a="http://schemas.openxmlformats.org/drawingml/2006/main">
             <a:fillRect/>

--- a/skills/presentation-template-library/skills/artifact-template-paper-seminar/assets/reference.pptx
+++ b/skills/presentation-template-library/skills/artifact-template-paper-seminar/assets/reference.pptx
@@ -376,7 +376,7 @@
     <p:bg>
       <p:bgPr>
         <a:blipFill xmlns:a="http://schemas.openxmlformats.org/drawingml/2006/main">
-          <a:blip xmlns:r="http://schemas.openxmlformats.org/officeDocument/2006/relationships" r:embed="rIdOfficeKitImage56df3e49f11f0ff0_1"/>
+          <a:blip xmlns:r="http://schemas.openxmlformats.org/officeDocument/2006/relationships" r:embed="rIdOfficeKitImage8bca39c9b7ba070f_1"/>
           <a:stretch>
             <a:fillRect/>
           </a:stretch>
@@ -1231,8 +1231,8 @@
           <p:nvPr/>
         </p:nvPicPr>
         <p:blipFill>
-          <a:blip xmlns:r="http://schemas.openxmlformats.org/officeDocument/2006/relationships" xmlns:a="http://schemas.openxmlformats.org/drawingml/2006/main" r:embed="rIdOfficeKitImage8bca39c9b7ba070f_1"/>
-          <a:srcRect xmlns:a="http://schemas.openxmlformats.org/drawingml/2006/main" l="0" t="47256" r="0" b="47256"/>
+          <a:blip xmlns:r="http://schemas.openxmlformats.org/officeDocument/2006/relationships" xmlns:a="http://schemas.openxmlformats.org/drawingml/2006/main" r:embed="rIdOfficeKitImage56df3e49f11f0ff0_1"/>
+          <a:srcRect xmlns:a="http://schemas.openxmlformats.org/drawingml/2006/main" l="0" t="47258" r="0" b="47258"/>
           <a:stretch xmlns:a="http://schemas.openxmlformats.org/drawingml/2006/main">
             <a:fillRect/>
           </a:stretch>
@@ -2374,7 +2374,7 @@
         </p:xfrm>
         <a:graphic xmlns:a="http://schemas.openxmlformats.org/drawingml/2006/main">
           <a:graphicData uri="http://schemas.openxmlformats.org/drawingml/2006/chart">
-            <c:chart xmlns:r="http://schemas.openxmlformats.org/officeDocument/2006/relationships" xmlns:c="http://schemas.openxmlformats.org/drawingml/2006/chart" r:id="Rd194f54bf7d04887"/>
+            <c:chart xmlns:r="http://schemas.openxmlformats.org/officeDocument/2006/relationships" xmlns:c="http://schemas.openxmlformats.org/drawingml/2006/chart" r:id="R7687eb96c1294e8a"/>
           </a:graphicData>
         </a:graphic>
       </p:graphicFrame>
@@ -3932,8 +3932,8 @@
           <p:nvPr/>
         </p:nvPicPr>
         <p:blipFill>
-          <a:blip xmlns:r="http://schemas.openxmlformats.org/officeDocument/2006/relationships" xmlns:a="http://schemas.openxmlformats.org/drawingml/2006/main" r:embed="rIdOfficeKitImage56df3e49f11f0ff0_1"/>
-          <a:srcRect xmlns:a="http://schemas.openxmlformats.org/drawingml/2006/main" l="0" t="47258" r="0" b="47258"/>
+          <a:blip xmlns:r="http://schemas.openxmlformats.org/officeDocument/2006/relationships" xmlns:a="http://schemas.openxmlformats.org/drawingml/2006/main" r:embed="rIdOfficeKitImage8bca39c9b7ba070f_1"/>
+          <a:srcRect xmlns:a="http://schemas.openxmlformats.org/drawingml/2006/main" l="0" t="47256" r="0" b="47256"/>
           <a:stretch xmlns:a="http://schemas.openxmlformats.org/drawingml/2006/main">
             <a:fillRect/>
           </a:stretch>
@@ -5198,8 +5198,8 @@
           <p:nvPr/>
         </p:nvPicPr>
         <p:blipFill>
-          <a:blip xmlns:r="http://schemas.openxmlformats.org/officeDocument/2006/relationships" xmlns:a="http://schemas.openxmlformats.org/drawingml/2006/main" r:embed="rIdOfficeKitImage8bca39c9b7ba070f_1"/>
-          <a:srcRect xmlns:a="http://schemas.openxmlformats.org/drawingml/2006/main" l="0" t="47256" r="0" b="47256"/>
+          <a:blip xmlns:r="http://schemas.openxmlformats.org/officeDocument/2006/relationships" xmlns:a="http://schemas.openxmlformats.org/drawingml/2006/main" r:embed="rIdOfficeKitImage56df3e49f11f0ff0_1"/>
+          <a:srcRect xmlns:a="http://schemas.openxmlformats.org/drawingml/2006/main" l="0" t="47258" r="0" b="47258"/>
           <a:stretch xmlns:a="http://schemas.openxmlformats.org/drawingml/2006/main">
             <a:fillRect/>
           </a:stretch>

--- a/skills/presentation-template-library/skills/artifact-template-paper-seminar/assets/reference.pptx
+++ b/skills/presentation-template-library/skills/artifact-template-paper-seminar/assets/reference.pptx
@@ -2374,7 +2374,7 @@
         </p:xfrm>
         <a:graphic xmlns:a="http://schemas.openxmlformats.org/drawingml/2006/main">
           <a:graphicData uri="http://schemas.openxmlformats.org/drawingml/2006/chart">
-            <c:chart xmlns:r="http://schemas.openxmlformats.org/officeDocument/2006/relationships" xmlns:c="http://schemas.openxmlformats.org/drawingml/2006/chart" r:id="R7687eb96c1294e8a"/>
+            <c:chart xmlns:r="http://schemas.openxmlformats.org/officeDocument/2006/relationships" xmlns:c="http://schemas.openxmlformats.org/drawingml/2006/chart" r:id="R4cb9949bbe1e467a"/>
           </a:graphicData>
         </a:graphic>
       </p:graphicFrame>
@@ -3932,7 +3932,7 @@
           <p:nvPr/>
         </p:nvPicPr>
         <p:blipFill>
-          <a:blip xmlns:r="http://schemas.openxmlformats.org/officeDocument/2006/relationships" xmlns:a="http://schemas.openxmlformats.org/drawingml/2006/main" r:embed="rIdOfficeKitImage8bca39c9b7ba070f_1"/>
+          <a:blip xmlns:r="http://schemas.openxmlformats.org/officeDocument/2006/relationships" xmlns:a="http://schemas.openxmlformats.org/drawingml/2006/main" r:embed="rIdOfficeKitImage2f5be6b798f5ce32_1"/>
           <a:srcRect xmlns:a="http://schemas.openxmlformats.org/drawingml/2006/main" l="0" t="47256" r="0" b="47256"/>
           <a:stretch xmlns:a="http://schemas.openxmlformats.org/drawingml/2006/main">
             <a:fillRect/>
@@ -5198,8 +5198,8 @@
           <p:nvPr/>
         </p:nvPicPr>
         <p:blipFill>
-          <a:blip xmlns:r="http://schemas.openxmlformats.org/officeDocument/2006/relationships" xmlns:a="http://schemas.openxmlformats.org/drawingml/2006/main" r:embed="rIdOfficeKitImage56df3e49f11f0ff0_1"/>
-          <a:srcRect xmlns:a="http://schemas.openxmlformats.org/drawingml/2006/main" l="0" t="47258" r="0" b="47258"/>
+          <a:blip xmlns:r="http://schemas.openxmlformats.org/officeDocument/2006/relationships" xmlns:a="http://schemas.openxmlformats.org/drawingml/2006/main" r:embed="rIdOfficeKitImage8bca39c9b7ba070f_1"/>
+          <a:srcRect xmlns:a="http://schemas.openxmlformats.org/drawingml/2006/main" l="0" t="47256" r="0" b="47256"/>
           <a:stretch xmlns:a="http://schemas.openxmlformats.org/drawingml/2006/main">
             <a:fillRect/>
           </a:stretch>

--- a/skills/presentation-template-library/skills/artifact-template-paper-seminar/assets/reference.pptx
+++ b/skills/presentation-template-library/skills/artifact-template-paper-seminar/assets/reference.pptx
@@ -376,7 +376,7 @@
     <p:bg>
       <p:bgPr>
         <a:blipFill xmlns:a="http://schemas.openxmlformats.org/drawingml/2006/main">
-          <a:blip xmlns:r="http://schemas.openxmlformats.org/officeDocument/2006/relationships" r:embed="rIdOfficeKitImage8bca39c9b7ba070f_1"/>
+          <a:blip xmlns:r="http://schemas.openxmlformats.org/officeDocument/2006/relationships" r:embed="rIdOfficeKitImage7af3bddd520e715f_1"/>
           <a:stretch>
             <a:fillRect/>
           </a:stretch>
@@ -1231,7 +1231,7 @@
           <p:nvPr/>
         </p:nvPicPr>
         <p:blipFill>
-          <a:blip xmlns:r="http://schemas.openxmlformats.org/officeDocument/2006/relationships" xmlns:a="http://schemas.openxmlformats.org/drawingml/2006/main" r:embed="rIdOfficeKitImage56df3e49f11f0ff0_1"/>
+          <a:blip xmlns:r="http://schemas.openxmlformats.org/officeDocument/2006/relationships" xmlns:a="http://schemas.openxmlformats.org/drawingml/2006/main" r:embed="rIdOfficeKitImage8579b0a87ff097c1_1"/>
           <a:srcRect xmlns:a="http://schemas.openxmlformats.org/drawingml/2006/main" l="0" t="47258" r="0" b="47258"/>
           <a:stretch xmlns:a="http://schemas.openxmlformats.org/drawingml/2006/main">
             <a:fillRect/>
@@ -2161,7 +2161,7 @@
           <p:nvPr/>
         </p:nvPicPr>
         <p:blipFill>
-          <a:blip xmlns:r="http://schemas.openxmlformats.org/officeDocument/2006/relationships" xmlns:a="http://schemas.openxmlformats.org/drawingml/2006/main" r:embed="rIdOfficeKitImagec2e9a9d799668dd3_1"/>
+          <a:blip xmlns:r="http://schemas.openxmlformats.org/officeDocument/2006/relationships" xmlns:a="http://schemas.openxmlformats.org/drawingml/2006/main" r:embed="rIdOfficeKitImage260725ec97288f31_1"/>
           <a:srcRect xmlns:a="http://schemas.openxmlformats.org/drawingml/2006/main" l="0" t="47258" r="0" b="47258"/>
           <a:stretch xmlns:a="http://schemas.openxmlformats.org/drawingml/2006/main">
             <a:fillRect/>
@@ -2374,7 +2374,7 @@
         </p:xfrm>
         <a:graphic xmlns:a="http://schemas.openxmlformats.org/drawingml/2006/main">
           <a:graphicData uri="http://schemas.openxmlformats.org/drawingml/2006/chart">
-            <c:chart xmlns:r="http://schemas.openxmlformats.org/officeDocument/2006/relationships" xmlns:c="http://schemas.openxmlformats.org/drawingml/2006/chart" r:id="R4cb9949bbe1e467a"/>
+            <c:chart xmlns:r="http://schemas.openxmlformats.org/officeDocument/2006/relationships" xmlns:c="http://schemas.openxmlformats.org/drawingml/2006/chart" r:id="R5a76d68515184456"/>
           </a:graphicData>
         </a:graphic>
       </p:graphicFrame>
@@ -2745,7 +2745,7 @@
           <p:nvPr/>
         </p:nvPicPr>
         <p:blipFill>
-          <a:blip xmlns:r="http://schemas.openxmlformats.org/officeDocument/2006/relationships" xmlns:a="http://schemas.openxmlformats.org/drawingml/2006/main" r:embed="rIdOfficeKitImage8fbc298f8d1b7a3c_1"/>
+          <a:blip xmlns:r="http://schemas.openxmlformats.org/officeDocument/2006/relationships" xmlns:a="http://schemas.openxmlformats.org/drawingml/2006/main" r:embed="rIdOfficeKitImagee231e9493e535fbe_1"/>
           <a:srcRect xmlns:a="http://schemas.openxmlformats.org/drawingml/2006/main" l="0" t="47258" r="0" b="47258"/>
           <a:stretch xmlns:a="http://schemas.openxmlformats.org/drawingml/2006/main">
             <a:fillRect/>
@@ -3932,7 +3932,7 @@
           <p:nvPr/>
         </p:nvPicPr>
         <p:blipFill>
-          <a:blip xmlns:r="http://schemas.openxmlformats.org/officeDocument/2006/relationships" xmlns:a="http://schemas.openxmlformats.org/drawingml/2006/main" r:embed="rIdOfficeKitImage2f5be6b798f5ce32_1"/>
+          <a:blip xmlns:r="http://schemas.openxmlformats.org/officeDocument/2006/relationships" xmlns:a="http://schemas.openxmlformats.org/drawingml/2006/main" r:embed="rIdOfficeKitImagee307d6c31b3d1e07_1"/>
           <a:srcRect xmlns:a="http://schemas.openxmlformats.org/drawingml/2006/main" l="0" t="47256" r="0" b="47256"/>
           <a:stretch xmlns:a="http://schemas.openxmlformats.org/drawingml/2006/main">
             <a:fillRect/>
@@ -5198,8 +5198,8 @@
           <p:nvPr/>
         </p:nvPicPr>
         <p:blipFill>
-          <a:blip xmlns:r="http://schemas.openxmlformats.org/officeDocument/2006/relationships" xmlns:a="http://schemas.openxmlformats.org/drawingml/2006/main" r:embed="rIdOfficeKitImage8bca39c9b7ba070f_1"/>
-          <a:srcRect xmlns:a="http://schemas.openxmlformats.org/drawingml/2006/main" l="0" t="47256" r="0" b="47256"/>
+          <a:blip xmlns:r="http://schemas.openxmlformats.org/officeDocument/2006/relationships" xmlns:a="http://schemas.openxmlformats.org/drawingml/2006/main" r:embed="rIdOfficeKitImage06e55191024fa458_1"/>
+          <a:srcRect xmlns:a="http://schemas.openxmlformats.org/drawingml/2006/main" l="0" t="47258" r="0" b="47258"/>
           <a:stretch xmlns:a="http://schemas.openxmlformats.org/drawingml/2006/main">
             <a:fillRect/>
           </a:stretch>

--- a/skills/presentation-template-library/skills/artifact-template-paper-seminar/assets/reference.pptx
+++ b/skills/presentation-template-library/skills/artifact-template-paper-seminar/assets/reference.pptx
@@ -2374,7 +2374,7 @@
         </p:xfrm>
         <a:graphic xmlns:a="http://schemas.openxmlformats.org/drawingml/2006/main">
           <a:graphicData uri="http://schemas.openxmlformats.org/drawingml/2006/chart">
-            <c:chart xmlns:r="http://schemas.openxmlformats.org/officeDocument/2006/relationships" xmlns:c="http://schemas.openxmlformats.org/drawingml/2006/chart" r:id="R5a76d68515184456"/>
+            <c:chart xmlns:r="http://schemas.openxmlformats.org/officeDocument/2006/relationships" xmlns:c="http://schemas.openxmlformats.org/drawingml/2006/chart" r:id="R5184fd71a85f4cba"/>
           </a:graphicData>
         </a:graphic>
       </p:graphicFrame>
